--- a/plugins/design-themes/skills/magazine/assets/demos/demo-slides.pptx
+++ b/plugins/design-themes/skills/magazine/assets/demos/demo-slides.pptx
@@ -3938,7 +3938,7 @@
         </p:nvCxnSpPr>
         <p:spPr>
           <a:xfrm>
-            <a:off x="8412480" y="3218688"/>
+            <a:off x="8412480" y="3218687"/>
             <a:ext cx="2651760" cy="0"/>
           </a:xfrm>
           <a:prstGeom prst="line">
@@ -3973,7 +3973,7 @@
         </p:nvSpPr>
         <p:spPr>
           <a:xfrm>
-            <a:off x="8412480" y="3328416"/>
+            <a:off x="8412480" y="3328415"/>
             <a:ext cx="2651760" cy="128016"/>
           </a:xfrm>
           <a:prstGeom prst="rect">
@@ -4014,7 +4014,7 @@
         </p:nvSpPr>
         <p:spPr>
           <a:xfrm>
-            <a:off x="8412480" y="3493008"/>
+            <a:off x="8412480" y="3493007"/>
             <a:ext cx="2651760" cy="310896"/>
           </a:xfrm>
           <a:prstGeom prst="rect">
@@ -4055,7 +4055,7 @@
         </p:nvSpPr>
         <p:spPr>
           <a:xfrm>
-            <a:off x="8412480" y="3840480"/>
+            <a:off x="8412480" y="3840479"/>
             <a:ext cx="2651760" cy="237744"/>
           </a:xfrm>
           <a:prstGeom prst="rect">
